--- a/slides/Claude-Code-基礎実務編.pptx
+++ b/slides/Claude-Code-基礎実務編.pptx
@@ -4990,6 +4990,12 @@
           <a:p>
             <a:r>
               <a:t>配布リポジトリのREADMEへ案内。上級編では照合、計測の定義、独立レビューに進む。</a:t>
+            </a:r>
+          </a:p>
+          <a:p/>
+          <a:p>
+            <a:r>
+              <a:t>配布教材：https://github.com/takpfive/aimokuyokai-claude-code-course-20261031</a:t>
             </a:r>
           </a:p>
         </p:txBody>
@@ -12671,7 +12677,7 @@
           <a:lstStyle/>
           <a:p>
             <a:r>
-              <a:t>Claude Code実画面・2026-10-29 / 架空教材</a:t>
+              <a:t>Claude Code出力CSVの閲覧ページ / 架空データ</a:t>
             </a:r>
           </a:p>
         </p:txBody>
@@ -19078,6 +19084,9 @@
           <a:lstStyle/>
           <a:p>
             <a:r>
+              <a:rPr>
+                <a:hlinkClick r:id="rId3"/>
+              </a:rPr>
               <a:t>配布教材：GitHubのREADMEから</a:t>
             </a:r>
           </a:p>
